--- a/workspace/clients/brisken/deliverables/lead-generation/rome-2026/decks/brisken-mdh-commodities.pptx
+++ b/workspace/clients/brisken/deliverables/lead-generation/rome-2026/decks/brisken-mdh-commodities.pptx
@@ -7478,7 +7478,7 @@
                 <a:ea typeface="Segoe UI" pitchFamily="34" charset="-122"/>
                 <a:cs typeface="Segoe UI" pitchFamily="34" charset="-120"/>
               </a:rPr>
-              <a:t>      SAP Certified, built on SAP Business Technology Platform      ISO 27001 and SOC 1 Type II</a:t>
+              <a:t>      SAP Certified, built on SAP's own cloud      ISO 27001 and SOC 1 Type II</a:t>
             </a:r>
             <a:endParaRPr lang="en-US" sz="1250" dirty="0"/>
           </a:p>
